--- a/episodes_public/2026-06-08_record_straight/june_report.pptx
+++ b/episodes_public/2026-06-08_record_straight/june_report.pptx
@@ -156,10 +156,10 @@
                   <c:v>Jun 9 (Tue)</c:v>
                 </c:pt>
                 <c:pt idx="2">
-                  <c:v>Jun 11 (Thu)</c:v>
+                  <c:v>Jul 17 (Fri)</c:v>
                 </c:pt>
                 <c:pt idx="3">
-                  <c:v>Jun 12 (Fri)</c:v>
+                  <c:v>Jul 17 (Fri)</c:v>
                 </c:pt>
               </c:strCache>
             </c:strRef>
@@ -177,10 +177,10 @@
                   <c:v>13765</c:v>
                 </c:pt>
                 <c:pt idx="2">
-                  <c:v>23045</c:v>
+                  <c:v>42440</c:v>
                 </c:pt>
                 <c:pt idx="3">
-                  <c:v>42034</c:v>
+                  <c:v>42450</c:v>
                 </c:pt>
               </c:numCache>
             </c:numRef>
@@ -220,10 +220,10 @@
                   <c:v>Jun 9 (Tue)</c:v>
                 </c:pt>
                 <c:pt idx="2">
-                  <c:v>Jun 11 (Thu)</c:v>
+                  <c:v>Jul 17 (Fri)</c:v>
                 </c:pt>
                 <c:pt idx="3">
-                  <c:v>Jun 12 (Fri)</c:v>
+                  <c:v>Jul 17 (Fri)</c:v>
                 </c:pt>
               </c:strCache>
             </c:strRef>
@@ -241,10 +241,10 @@
                   <c:v>2792</c:v>
                 </c:pt>
                 <c:pt idx="2">
-                  <c:v>3326</c:v>
+                  <c:v>41257</c:v>
                 </c:pt>
                 <c:pt idx="3">
-                  <c:v>31094</c:v>
+                  <c:v>41257</c:v>
                 </c:pt>
               </c:numCache>
             </c:numRef>
@@ -284,10 +284,10 @@
                   <c:v>Jun 9 (Tue)</c:v>
                 </c:pt>
                 <c:pt idx="2">
-                  <c:v>Jun 11 (Thu)</c:v>
+                  <c:v>Jul 17 (Fri)</c:v>
                 </c:pt>
                 <c:pt idx="3">
-                  <c:v>Jun 12 (Fri)</c:v>
+                  <c:v>Jul 17 (Fri)</c:v>
                 </c:pt>
               </c:strCache>
             </c:strRef>
@@ -305,10 +305,10 @@
                   <c:v>8646</c:v>
                 </c:pt>
                 <c:pt idx="2">
-                  <c:v>10910</c:v>
+                  <c:v>24335</c:v>
                 </c:pt>
                 <c:pt idx="3">
-                  <c:v>17709</c:v>
+                  <c:v>24335</c:v>
                 </c:pt>
               </c:numCache>
             </c:numRef>
@@ -409,10 +409,10 @@
               <c:strCache>
                 <c:ptCount val="4"/>
                 <c:pt idx="0">
-                  <c:v>Instagram</c:v>
+                  <c:v>Instagram*</c:v>
                 </c:pt>
                 <c:pt idx="1">
-                  <c:v>TikTok</c:v>
+                  <c:v>TikTok*</c:v>
                 </c:pt>
                 <c:pt idx="2">
                   <c:v>Facebook*</c:v>
@@ -430,16 +430,16 @@
                 <c:formatCode>General</c:formatCode>
                 <c:ptCount val="4"/>
                 <c:pt idx="0">
-                  <c:v>2663.8</c:v>
+                  <c:v>44.1</c:v>
                 </c:pt>
                 <c:pt idx="1">
-                  <c:v>97.2</c:v>
+                  <c:v>306.4</c:v>
                 </c:pt>
                 <c:pt idx="2">
-                  <c:v>538.8</c:v>
+                  <c:v>365.3</c:v>
                 </c:pt>
                 <c:pt idx="3">
-                  <c:v>195.8</c:v>
+                  <c:v>553.3</c:v>
                 </c:pt>
               </c:numCache>
             </c:numRef>
@@ -3822,7 +3822,7 @@
                 </a:solidFill>
                 <a:latin typeface="Helvetica Neue"/>
               </a:rPr>
-              <a:t>Prepared by Zhamir Pascual — Kaname Z</a:t>
+              <a:t>Prepared by Zhamir Pascual — Z</a:t>
             </a:r>
           </a:p>
         </p:txBody>
@@ -4021,7 +4021,7 @@
                 </a:solidFill>
                 <a:latin typeface="Georgia"/>
               </a:rPr>
-              <a:t>59</a:t>
+              <a:t>100</a:t>
             </a:r>
           </a:p>
         </p:txBody>
@@ -4212,7 +4212,7 @@
                 </a:solidFill>
                 <a:latin typeface="Helvetica Neue"/>
               </a:rPr>
-              <a:t>~2 posts/week</a:t>
+              <a:t>~0 posts/week</a:t>
             </a:r>
           </a:p>
         </p:txBody>
@@ -4246,7 +4246,7 @@
                 </a:solidFill>
                 <a:latin typeface="Helvetica Neue"/>
               </a:rPr>
-              <a:t>6 posts in data  ·  Sporadic posting  ·  No coordinated strategy</a:t>
+              <a:t>0 posts in data  ·  Sporadic posting  ·  No coordinated strategy</a:t>
             </a:r>
           </a:p>
         </p:txBody>
@@ -4402,7 +4402,7 @@
                 </a:solidFill>
                 <a:latin typeface="Helvetica Neue"/>
               </a:rPr>
-              <a:t>~26 posts/week</a:t>
+              <a:t>~44 posts/week</a:t>
             </a:r>
           </a:p>
         </p:txBody>
@@ -4436,7 +4436,7 @@
                 </a:solidFill>
                 <a:latin typeface="Helvetica Neue"/>
               </a:rPr>
-              <a:t>59 posts  ·  2-3 per day  ·  IG + TT + FB coordinated daily</a:t>
+              <a:t>100 posts  ·  2-3 per day  ·  IG + TT + FB coordinated daily</a:t>
             </a:r>
           </a:p>
         </p:txBody>
@@ -4756,7 +4756,7 @@
                 </a:solidFill>
                 <a:latin typeface="Georgia"/>
               </a:rPr>
-              <a:t>2.3×</a:t>
+              <a:t>1.4×</a:t>
             </a:r>
           </a:p>
         </p:txBody>
@@ -5004,7 +5004,7 @@
                 </a:solidFill>
                 <a:latin typeface="Helvetica Neue"/>
               </a:rPr>
-              <a:t>1,896 views avg</a:t>
+              <a:t>1,201 views avg</a:t>
             </a:r>
           </a:p>
         </p:txBody>
@@ -5038,7 +5038,7 @@
                 </a:solidFill>
                 <a:latin typeface="Helvetica Neue"/>
               </a:rPr>
-              <a:t>(28 posts, days old)</a:t>
+              <a:t>(86 posts, days old)</a:t>
             </a:r>
           </a:p>
         </p:txBody>
@@ -5194,7 +5194,7 @@
                 </a:solidFill>
                 <a:latin typeface="Georgia"/>
               </a:rPr>
-              <a:t>3.0×</a:t>
+              <a:t>4.1×</a:t>
             </a:r>
           </a:p>
         </p:txBody>
@@ -5340,7 +5340,7 @@
                 </a:solidFill>
                 <a:latin typeface="Helvetica Neue"/>
               </a:rPr>
-              <a:t>604 views avg</a:t>
+              <a:t>564 views avg</a:t>
             </a:r>
           </a:p>
         </p:txBody>
@@ -5374,7 +5374,7 @@
                 </a:solidFill>
                 <a:latin typeface="Helvetica Neue"/>
               </a:rPr>
-              <a:t>(19 posts, weeks old)</a:t>
+              <a:t>(17 posts, weeks old)</a:t>
             </a:r>
           </a:p>
         </p:txBody>
@@ -5442,7 +5442,7 @@
                 </a:solidFill>
                 <a:latin typeface="Helvetica Neue"/>
               </a:rPr>
-              <a:t>1,806 views avg</a:t>
+              <a:t>2,293 views avg</a:t>
             </a:r>
           </a:p>
         </p:txBody>
@@ -5476,7 +5476,7 @@
                 </a:solidFill>
                 <a:latin typeface="Helvetica Neue"/>
               </a:rPr>
-              <a:t>(17 posts, days old)</a:t>
+              <a:t>(77 posts, days old)</a:t>
             </a:r>
           </a:p>
         </p:txBody>
@@ -5632,7 +5632,7 @@
                 </a:solidFill>
                 <a:latin typeface="Georgia"/>
               </a:rPr>
-              <a:t>6.4×</a:t>
+              <a:t>4.7×</a:t>
             </a:r>
           </a:p>
         </p:txBody>
@@ -5880,7 +5880,7 @@
                 </a:solidFill>
                 <a:latin typeface="Helvetica Neue"/>
               </a:rPr>
-              <a:t>1,316 views avg</a:t>
+              <a:t>958 views avg</a:t>
             </a:r>
           </a:p>
         </p:txBody>
@@ -5914,7 +5914,7 @@
                 </a:solidFill>
                 <a:latin typeface="Helvetica Neue"/>
               </a:rPr>
-              <a:t>(34 posts, days old)</a:t>
+              <a:t>(93 posts, days old)</a:t>
             </a:r>
           </a:p>
         </p:txBody>
@@ -6362,7 +6362,7 @@
                 </a:solidFill>
                 <a:latin typeface="Helvetica Neue"/>
               </a:rPr>
-              <a:t>Comparing Jun 8 (Mon) (Day 1) to Jun 24 (Wed) (today) — total views across all tracked posts per platform.</a:t>
+              <a:t>Comparing Jun 8 (Mon) (Day 1) to Jul 11 (Sat) (today) — total views across all tracked posts per platform.</a:t>
             </a:r>
           </a:p>
         </p:txBody>
@@ -6536,7 +6536,7 @@
                 </a:solidFill>
                 <a:latin typeface="Helvetica Neue"/>
               </a:rPr>
-              <a:t>INSTAGRAM</a:t>
+              <a:t>INSTAGRAM (est.)</a:t>
             </a:r>
           </a:p>
         </p:txBody>
@@ -6570,7 +6570,7 @@
                 </a:solidFill>
                 <a:latin typeface="Helvetica Neue"/>
               </a:rPr>
-              <a:t>1,987 → 54,916 views</a:t>
+              <a:t>~15,004 avg/post → ~103,286 avg/post</a:t>
             </a:r>
           </a:p>
         </p:txBody>
@@ -6692,7 +6692,7 @@
                 </a:solidFill>
                 <a:latin typeface="Helvetica Neue"/>
               </a:rPr>
-              <a:t>TIKTOK</a:t>
+              <a:t>TIKTOK (est.)</a:t>
             </a:r>
           </a:p>
         </p:txBody>
@@ -6726,7 +6726,7 @@
                 </a:solidFill>
                 <a:latin typeface="Helvetica Neue"/>
               </a:rPr>
-              <a:t>2,059 → 4,061 views</a:t>
+              <a:t>~9,594 avg/post → ~176,583 avg/post</a:t>
             </a:r>
           </a:p>
         </p:txBody>
@@ -6882,7 +6882,7 @@
                 </a:solidFill>
                 <a:latin typeface="Helvetica Neue"/>
               </a:rPr>
-              <a:t>~3,707 avg/post → ~44,730 avg/post</a:t>
+              <a:t>~3,707 avg/post → ~89,120 avg/post</a:t>
             </a:r>
           </a:p>
         </p:txBody>
@@ -7038,7 +7038,7 @@
                 </a:solidFill>
                 <a:latin typeface="Helvetica Neue"/>
               </a:rPr>
-              <a:t>120 → 355 views</a:t>
+              <a:t>120 → 784 views</a:t>
             </a:r>
           </a:p>
         </p:txBody>
@@ -7426,7 +7426,7 @@
                 </a:solidFill>
                 <a:latin typeface="Georgia"/>
               </a:rPr>
-              <a:t>2,549</a:t>
+              <a:t>1,764</a:t>
             </a:r>
           </a:p>
         </p:txBody>
@@ -7494,7 +7494,7 @@
                 </a:solidFill>
                 <a:latin typeface="Helvetica Neue"/>
               </a:rPr>
-              <a:t>26 posts · 66,279 total</a:t>
+              <a:t>44 posts · 77,609 total</a:t>
             </a:r>
           </a:p>
         </p:txBody>
@@ -7752,7 +7752,7 @@
                 </a:solidFill>
                 <a:latin typeface="Georgia"/>
               </a:rPr>
-              <a:t>1,415</a:t>
+              <a:t>1,201</a:t>
             </a:r>
           </a:p>
         </p:txBody>
@@ -7820,7 +7820,7 @@
                 </a:solidFill>
                 <a:latin typeface="Helvetica Neue"/>
               </a:rPr>
-              <a:t>13 posts · 18,401 total</a:t>
+              <a:t>20 posts · 24,028 total</a:t>
             </a:r>
           </a:p>
         </p:txBody>
@@ -8078,7 +8078,7 @@
                 </a:solidFill>
                 <a:latin typeface="Georgia"/>
               </a:rPr>
-              <a:t>1,048</a:t>
+              <a:t>1,290</a:t>
             </a:r>
           </a:p>
         </p:txBody>
@@ -8146,7 +8146,7 @@
                 </a:solidFill>
                 <a:latin typeface="Helvetica Neue"/>
               </a:rPr>
-              <a:t>21 posts · 22,008 total</a:t>
+              <a:t>34 posts · 43,856 total</a:t>
             </a:r>
           </a:p>
         </p:txBody>
@@ -8214,7 +8214,7 @@
                 </a:solidFill>
                 <a:latin typeface="Helvetica Neue"/>
               </a:rPr>
-              <a:t>2,295 views — So many food choices right next to Porto's downtow</a:t>
+              <a:t>13,600 views — Mama Lu's is coming to Downey! Asian community fav</a:t>
             </a:r>
           </a:p>
         </p:txBody>
@@ -8404,7 +8404,7 @@
                 </a:solidFill>
                 <a:latin typeface="Georgia"/>
               </a:rPr>
-              <a:t>1,490</a:t>
+              <a:t>4,037</a:t>
             </a:r>
           </a:p>
         </p:txBody>
@@ -8472,7 +8472,7 @@
                 </a:solidFill>
                 <a:latin typeface="Helvetica Neue"/>
               </a:rPr>
-              <a:t>8 posts · 11,920 total</a:t>
+              <a:t>26 posts · 104,973 total</a:t>
             </a:r>
           </a:p>
         </p:txBody>
@@ -8540,7 +8540,7 @@
                 </a:solidFill>
                 <a:latin typeface="Helvetica Neue"/>
               </a:rPr>
-              <a:t>4,344 views — Round One is coming to Stonewood Mall, transformin</a:t>
+              <a:t>29,200 views — Get ready! Round One is taking over the old Sears </a:t>
             </a:r>
           </a:p>
         </p:txBody>
@@ -9200,7 +9200,7 @@
                 </a:solidFill>
                 <a:latin typeface="Helvetica Neue"/>
               </a:rPr>
-              <a:t>Grew up in Huntington Park and still own property there. The city's o.</a:t>
+              <a:t>Combat jobs aren't for everyone. See how your MOS determines deploymen</a:t>
             </a:r>
           </a:p>
         </p:txBody>
@@ -9234,7 +9234,7 @@
                 </a:solidFill>
                 <a:latin typeface="Helvetica Neue"/>
               </a:rPr>
-              <a:t>9,839</a:t>
+              <a:t>33,400</a:t>
             </a:r>
           </a:p>
         </p:txBody>
@@ -9268,7 +9268,7 @@
                 </a:solidFill>
                 <a:latin typeface="Helvetica Neue"/>
               </a:rPr>
-              <a:t>548</a:t>
+              <a:t>2,122</a:t>
             </a:r>
           </a:p>
         </p:txBody>
@@ -9302,7 +9302,7 @@
                 </a:solidFill>
                 <a:latin typeface="Helvetica Neue"/>
               </a:rPr>
-              <a:t>Political</a:t>
+              <a:t>Other</a:t>
             </a:r>
           </a:p>
         </p:txBody>
@@ -9458,7 +9458,7 @@
                 </a:solidFill>
                 <a:latin typeface="Helvetica Neue"/>
               </a:rPr>
-              <a:t>IG</a:t>
+              <a:t>TT</a:t>
             </a:r>
           </a:p>
         </p:txBody>
@@ -9492,7 +9492,7 @@
                 </a:solidFill>
                 <a:latin typeface="Helvetica Neue"/>
               </a:rPr>
-              <a:t>A woman's outburst at a city council meeting, repeatedly warned by the</a:t>
+              <a:t>Get ready! Round One is taking over the old Sears at Stonewood Mall. T</a:t>
             </a:r>
           </a:p>
         </p:txBody>
@@ -9526,7 +9526,7 @@
                 </a:solidFill>
                 <a:latin typeface="Helvetica Neue"/>
               </a:rPr>
-              <a:t>6,996</a:t>
+              <a:t>29,200</a:t>
             </a:r>
           </a:p>
         </p:txBody>
@@ -9560,7 +9560,7 @@
                 </a:solidFill>
                 <a:latin typeface="Helvetica Neue"/>
               </a:rPr>
-              <a:t>91</a:t>
+              <a:t>2,513</a:t>
             </a:r>
           </a:p>
         </p:txBody>
@@ -9594,7 +9594,7 @@
                 </a:solidFill>
                 <a:latin typeface="Helvetica Neue"/>
               </a:rPr>
-              <a:t>Political</a:t>
+              <a:t>Community</a:t>
             </a:r>
           </a:p>
         </p:txBody>
@@ -9706,7 +9706,7 @@
                 </a:solidFill>
                 <a:latin typeface="Helvetica Neue"/>
               </a:rPr>
-              <a:t>FB</a:t>
+              <a:t>TT</a:t>
             </a:r>
           </a:p>
         </p:txBody>
@@ -9740,7 +9740,7 @@
                 </a:solidFill>
                 <a:latin typeface="Helvetica Neue"/>
               </a:rPr>
-              <a:t>After admitting 'I messed up,' a city councilman's inappropriate condu</a:t>
+              <a:t>Watch party in Stonewood Mall! Over 25,000 people showed up for this e</a:t>
             </a:r>
           </a:p>
         </p:txBody>
@@ -9774,7 +9774,7 @@
                 </a:solidFill>
                 <a:latin typeface="Helvetica Neue"/>
               </a:rPr>
-              <a:t>6,363</a:t>
+              <a:t>26,300</a:t>
             </a:r>
           </a:p>
         </p:txBody>
@@ -9808,7 +9808,7 @@
                 </a:solidFill>
                 <a:latin typeface="Helvetica Neue"/>
               </a:rPr>
-              <a:t>42</a:t>
+              <a:t>781</a:t>
             </a:r>
           </a:p>
         </p:txBody>
@@ -9842,7 +9842,7 @@
                 </a:solidFill>
                 <a:latin typeface="Helvetica Neue"/>
               </a:rPr>
-              <a:t>Political</a:t>
+              <a:t>Community</a:t>
             </a:r>
           </a:p>
         </p:txBody>
@@ -9988,7 +9988,7 @@
                 </a:solidFill>
                 <a:latin typeface="Helvetica Neue"/>
               </a:rPr>
-              <a:t>I grew up in Huntington Park, and I still own property there. But the </a:t>
+              <a:t>25,000+ people gathered for a watch party at Stonewood Mall! Despite t</a:t>
             </a:r>
           </a:p>
         </p:txBody>
@@ -10022,7 +10022,7 @@
                 </a:solidFill>
                 <a:latin typeface="Helvetica Neue"/>
               </a:rPr>
-              <a:t>6,136</a:t>
+              <a:t>15,536</a:t>
             </a:r>
           </a:p>
         </p:txBody>
@@ -10056,7 +10056,7 @@
                 </a:solidFill>
                 <a:latin typeface="Helvetica Neue"/>
               </a:rPr>
-              <a:t>199</a:t>
+              <a:t>259</a:t>
             </a:r>
           </a:p>
         </p:txBody>
@@ -10090,7 +10090,7 @@
                 </a:solidFill>
                 <a:latin typeface="Helvetica Neue"/>
               </a:rPr>
-              <a:t>Political</a:t>
+              <a:t>Community</a:t>
             </a:r>
           </a:p>
         </p:txBody>
@@ -10192,7 +10192,7 @@
                 </a:solidFill>
                 <a:latin typeface="Helvetica Neue"/>
               </a:rPr>
-              <a:t>World Cup profits hit $11 billion for FIFA, potentially reaching $13 .</a:t>
+              <a:t>Grew up in Huntington Park and still own property there. The city's o.</a:t>
             </a:r>
           </a:p>
         </p:txBody>
@@ -10226,7 +10226,7 @@
                 </a:solidFill>
                 <a:latin typeface="Helvetica Neue"/>
               </a:rPr>
-              <a:t>6,053</a:t>
+              <a:t>9,839</a:t>
             </a:r>
           </a:p>
         </p:txBody>
@@ -10260,7 +10260,7 @@
                 </a:solidFill>
                 <a:latin typeface="Helvetica Neue"/>
               </a:rPr>
-              <a:t>75</a:t>
+              <a:t>548</a:t>
             </a:r>
           </a:p>
         </p:txBody>
@@ -10294,7 +10294,7 @@
                 </a:solidFill>
                 <a:latin typeface="Helvetica Neue"/>
               </a:rPr>
-              <a:t>Fifa</a:t>
+              <a:t>Political</a:t>
             </a:r>
           </a:p>
         </p:txBody>
@@ -10406,7 +10406,7 @@
                 </a:solidFill>
                 <a:latin typeface="Helvetica Neue"/>
               </a:rPr>
-              <a:t>FB</a:t>
+              <a:t>TT</a:t>
             </a:r>
           </a:p>
         </p:txBody>
@@ -10440,7 +10440,7 @@
                 </a:solidFill>
                 <a:latin typeface="Helvetica Neue"/>
               </a:rPr>
-              <a:t>Tensions flared at the city council meeting as a woman repeatedly defi</a:t>
+              <a:t>Pop's Wings just opened and it's a must-try! Their pastrami sandwich w</a:t>
             </a:r>
           </a:p>
         </p:txBody>
@@ -10474,7 +10474,7 @@
                 </a:solidFill>
                 <a:latin typeface="Helvetica Neue"/>
               </a:rPr>
-              <a:t>5,812</a:t>
+              <a:t>7,698</a:t>
             </a:r>
           </a:p>
         </p:txBody>
@@ -10508,7 +10508,7 @@
                 </a:solidFill>
                 <a:latin typeface="Helvetica Neue"/>
               </a:rPr>
-              <a:t>0</a:t>
+              <a:t>377</a:t>
             </a:r>
           </a:p>
         </p:txBody>
@@ -10542,7 +10542,7 @@
                 </a:solidFill>
                 <a:latin typeface="Helvetica Neue"/>
               </a:rPr>
-              <a:t>Political</a:t>
+              <a:t>Other</a:t>
             </a:r>
           </a:p>
         </p:txBody>
@@ -10644,7 +10644,7 @@
                 </a:solidFill>
                 <a:latin typeface="Helvetica Neue"/>
               </a:rPr>
-              <a:t>Round One is coming to Stonewood Mall, transforming the old Sears spac</a:t>
+              <a:t>A woman's outburst at a city council meeting, repeatedly warned by the</a:t>
             </a:r>
           </a:p>
         </p:txBody>
@@ -10678,7 +10678,7 @@
                 </a:solidFill>
                 <a:latin typeface="Helvetica Neue"/>
               </a:rPr>
-              <a:t>4,344</a:t>
+              <a:t>7,031</a:t>
             </a:r>
           </a:p>
         </p:txBody>
@@ -10712,7 +10712,7 @@
                 </a:solidFill>
                 <a:latin typeface="Helvetica Neue"/>
               </a:rPr>
-              <a:t>129</a:t>
+              <a:t>93</a:t>
             </a:r>
           </a:p>
         </p:txBody>
@@ -10746,7 +10746,7 @@
                 </a:solidFill>
                 <a:latin typeface="Helvetica Neue"/>
               </a:rPr>
-              <a:t>Community</a:t>
+              <a:t>Political</a:t>
             </a:r>
           </a:p>
         </p:txBody>
@@ -10858,7 +10858,7 @@
                 </a:solidFill>
                 <a:latin typeface="Helvetica Neue"/>
               </a:rPr>
-              <a:t>IG</a:t>
+              <a:t>FB</a:t>
             </a:r>
           </a:p>
         </p:txBody>
@@ -10892,7 +10892,7 @@
                 </a:solidFill>
                 <a:latin typeface="Helvetica Neue"/>
               </a:rPr>
-              <a:t>He admitted he messed up, but not for the reason you think. It wasn't </a:t>
+              <a:t>After admitting 'I messed up,' a city councilman's inappropriate condu</a:t>
             </a:r>
           </a:p>
         </p:txBody>
@@ -10926,7 +10926,7 @@
                 </a:solidFill>
                 <a:latin typeface="Helvetica Neue"/>
               </a:rPr>
-              <a:t>3,795</a:t>
+              <a:t>6,363</a:t>
             </a:r>
           </a:p>
         </p:txBody>
@@ -10960,7 +10960,7 @@
                 </a:solidFill>
                 <a:latin typeface="Helvetica Neue"/>
               </a:rPr>
-              <a:t>78</a:t>
+              <a:t>42</a:t>
             </a:r>
           </a:p>
         </p:txBody>
@@ -10994,7 +10994,7 @@
                 </a:solidFill>
                 <a:latin typeface="Helvetica Neue"/>
               </a:rPr>
-              <a:t>Other</a:t>
+              <a:t>Political</a:t>
             </a:r>
           </a:p>
         </p:txBody>
